--- a/slides/Forecasting Volatility In Stock Market V2.pptx
+++ b/slides/Forecasting Volatility In Stock Market V2.pptx
@@ -831,7 +831,7 @@
             <a:pPr indent="0">
               <a:buNone/>
             </a:pPr>
-            <a:endParaRPr lang="en-US" sz="1800" b="0" u="none" strike="noStrike">
+            <a:endParaRPr lang="en-US" sz="1800" b="0" u="none" strike="noStrike" dirty="0">
               <a:solidFill>
                 <a:srgbClr val="000000"/>
               </a:solidFill>
@@ -3842,6 +3842,54 @@
           <a:chExt cx="0" cy="0"/>
         </a:xfrm>
       </p:grpSpPr>
+      <p:sp>
+        <p:nvSpPr>
+          <p:cNvPr id="3" name="TextBox 2">
+            <a:extLst>
+              <a:ext uri="{FF2B5EF4-FFF2-40B4-BE49-F238E27FC236}">
+                <a16:creationId xmlns:a16="http://schemas.microsoft.com/office/drawing/2014/main" id="{DE75E028-11AB-57DC-8F43-6F14F32887B9}"/>
+              </a:ext>
+            </a:extLst>
+          </p:cNvPr>
+          <p:cNvSpPr txBox="1"/>
+          <p:nvPr userDrawn="1">
+            <p:extLst>
+              <p:ext uri="{1162E1C5-73C7-4A58-AE30-91384D911F3F}">
+                <p184:classification xmlns:p184="http://schemas.microsoft.com/office/powerpoint/2018/4/main" val="ftr"/>
+              </p:ext>
+            </p:extLst>
+          </p:nvPr>
+        </p:nvSpPr>
+        <p:spPr>
+          <a:xfrm>
+            <a:off x="11315700" y="6672580"/>
+            <a:ext cx="833438" cy="121920"/>
+          </a:xfrm>
+          <a:prstGeom prst="rect">
+            <a:avLst/>
+          </a:prstGeom>
+        </p:spPr>
+        <p:txBody>
+          <a:bodyPr horzOverflow="overflow" lIns="0" tIns="0" rIns="0" bIns="0">
+            <a:spAutoFit/>
+          </a:bodyPr>
+          <a:lstStyle/>
+          <a:p>
+            <a:pPr algn="l"/>
+            <a:r>
+              <a:rPr lang="en-US" sz="800">
+                <a:solidFill>
+                  <a:srgbClr val="000000">
+                    <a:alpha val="50000"/>
+                  </a:srgbClr>
+                </a:solidFill>
+                <a:latin typeface="Aptos" panose="020B0004020202020204" pitchFamily="34" charset="0"/>
+              </a:rPr>
+              <a:t>Cisco Confidential</a:t>
+            </a:r>
+          </a:p>
+        </p:txBody>
+      </p:sp>
     </p:spTree>
   </p:cSld>
   <p:clrMap bg1="lt1" tx1="dk1" bg2="lt2" tx2="dk2" accent1="accent1" accent2="accent2" accent3="accent3" accent4="accent4" accent5="accent5" accent6="accent6" hlink="hlink" folHlink="folHlink"/>
@@ -4367,6 +4415,54 @@
                 <a:latin typeface="Calibri"/>
               </a:rPr>
               <a:t>Seventh Outline Level</a:t>
+            </a:r>
+          </a:p>
+        </p:txBody>
+      </p:sp>
+      <p:sp>
+        <p:nvSpPr>
+          <p:cNvPr id="5" name="TextBox 4">
+            <a:extLst>
+              <a:ext uri="{FF2B5EF4-FFF2-40B4-BE49-F238E27FC236}">
+                <a16:creationId xmlns:a16="http://schemas.microsoft.com/office/drawing/2014/main" id="{9F634321-B970-3C96-FB29-7E30736FFE29}"/>
+              </a:ext>
+            </a:extLst>
+          </p:cNvPr>
+          <p:cNvSpPr txBox="1"/>
+          <p:nvPr userDrawn="1">
+            <p:extLst>
+              <p:ext uri="{1162E1C5-73C7-4A58-AE30-91384D911F3F}">
+                <p184:classification xmlns:p184="http://schemas.microsoft.com/office/powerpoint/2018/4/main" val="ftr"/>
+              </p:ext>
+            </p:extLst>
+          </p:nvPr>
+        </p:nvSpPr>
+        <p:spPr>
+          <a:xfrm>
+            <a:off x="11315700" y="6672580"/>
+            <a:ext cx="833438" cy="121920"/>
+          </a:xfrm>
+          <a:prstGeom prst="rect">
+            <a:avLst/>
+          </a:prstGeom>
+        </p:spPr>
+        <p:txBody>
+          <a:bodyPr horzOverflow="overflow" lIns="0" tIns="0" rIns="0" bIns="0">
+            <a:spAutoFit/>
+          </a:bodyPr>
+          <a:lstStyle/>
+          <a:p>
+            <a:pPr algn="l"/>
+            <a:r>
+              <a:rPr lang="en-US" sz="800">
+                <a:solidFill>
+                  <a:srgbClr val="000000">
+                    <a:alpha val="50000"/>
+                  </a:srgbClr>
+                </a:solidFill>
+                <a:latin typeface="Aptos" panose="020B0004020202020204" pitchFamily="34" charset="0"/>
+              </a:rPr>
+              <a:t>Cisco Confidential</a:t>
             </a:r>
           </a:p>
         </p:txBody>
@@ -6130,37 +6226,73 @@
           </a:bodyPr>
           <a:lstStyle/>
           <a:p>
-            <a:pPr marL="0" marR="0" lvl="0" indent="0" algn="l" defTabSz="1219170" rtl="0" eaLnBrk="1" fontAlgn="auto" latinLnBrk="0" hangingPunct="1">
-              <a:lnSpc>
-                <a:spcPct val="100000"/>
-              </a:lnSpc>
-              <a:spcBef>
-                <a:spcPts val="0"/>
-              </a:spcBef>
-              <a:spcAft>
-                <a:spcPts val="0"/>
-              </a:spcAft>
-              <a:buClrTx/>
-              <a:buSzTx/>
-              <a:buFontTx/>
-              <a:buNone/>
-              <a:tabLst/>
+            <a:pPr marL="342900" lvl="0" indent="-342900" defTabSz="1219170">
+              <a:buFont typeface="Arial" panose="020B0604020202020204" pitchFamily="34" charset="0"/>
+              <a:buChar char="•"/>
               <a:defRPr/>
             </a:pPr>
-            <a:endParaRPr kumimoji="0" lang="en-US" sz="2400" b="0" i="0" u="none" strike="noStrike" kern="1200" cap="none" spc="0" normalizeH="0" baseline="0" noProof="0">
-              <a:ln>
-                <a:noFill/>
-              </a:ln>
+            <a:endParaRPr lang="en-US" sz="1400" dirty="0">
               <a:solidFill>
                 <a:srgbClr val="000000"/>
               </a:solidFill>
-              <a:effectLst/>
-              <a:uLnTx/>
-              <a:uFillTx/>
-              <a:latin typeface="Arial"/>
-              <a:ea typeface="+mn-ea"/>
-              <a:cs typeface="+mn-cs"/>
             </a:endParaRPr>
+          </a:p>
+          <a:p>
+            <a:pPr marL="342900" lvl="0" indent="-342900" defTabSz="1219170">
+              <a:buFont typeface="Arial" panose="020B0604020202020204" pitchFamily="34" charset="0"/>
+              <a:buChar char="•"/>
+              <a:defRPr/>
+            </a:pPr>
+            <a:endParaRPr lang="en-US" sz="1400" dirty="0">
+              <a:solidFill>
+                <a:srgbClr val="000000"/>
+              </a:solidFill>
+            </a:endParaRPr>
+          </a:p>
+          <a:p>
+            <a:pPr marL="342900" lvl="0" indent="-342900" defTabSz="1219170">
+              <a:buFont typeface="Arial" panose="020B0604020202020204" pitchFamily="34" charset="0"/>
+              <a:buChar char="•"/>
+              <a:defRPr/>
+            </a:pPr>
+            <a:r>
+              <a:rPr lang="en-US" sz="1400" dirty="0">
+                <a:solidFill>
+                  <a:srgbClr val="000000"/>
+                </a:solidFill>
+              </a:rPr>
+              <a:t>LSTM sees short term dynamics in feature window</a:t>
+            </a:r>
+          </a:p>
+          <a:p>
+            <a:pPr marL="342900" lvl="0" indent="-342900" defTabSz="1219170">
+              <a:buFont typeface="Arial" panose="020B0604020202020204" pitchFamily="34" charset="0"/>
+              <a:buChar char="•"/>
+              <a:defRPr/>
+            </a:pPr>
+            <a:r>
+              <a:rPr lang="en-US" sz="1400" dirty="0">
+                <a:solidFill>
+                  <a:srgbClr val="000000"/>
+                </a:solidFill>
+              </a:rPr>
+              <a:t>Adds memory without lag/moving average columns</a:t>
+            </a:r>
+          </a:p>
+          <a:p>
+            <a:pPr marL="800100" lvl="1" indent="-342900" defTabSz="1219170">
+              <a:buFont typeface="Arial" panose="020B0604020202020204" pitchFamily="34" charset="0"/>
+              <a:buChar char="•"/>
+              <a:defRPr/>
+            </a:pPr>
+            <a:r>
+              <a:rPr lang="en-US" sz="1400" dirty="0">
+                <a:solidFill>
+                  <a:srgbClr val="000000"/>
+                </a:solidFill>
+              </a:rPr>
+              <a:t>Each is its own feature</a:t>
+            </a:r>
           </a:p>
         </p:txBody>
       </p:sp>
@@ -6311,7 +6443,7 @@
               <a:tabLst/>
               <a:defRPr/>
             </a:pPr>
-            <a:endParaRPr kumimoji="0" lang="en-US" sz="2400" b="0" i="0" u="none" strike="noStrike" kern="1200" cap="none" spc="0" normalizeH="0" baseline="0" noProof="0">
+            <a:endParaRPr kumimoji="0" lang="en-US" sz="2400" b="0" i="0" u="none" strike="noStrike" kern="1200" cap="none" spc="0" normalizeH="0" baseline="0" noProof="0" dirty="0">
               <a:ln>
                 <a:noFill/>
               </a:ln>
@@ -6325,6 +6457,96 @@
               <a:ea typeface="+mn-ea"/>
               <a:cs typeface="+mn-cs"/>
             </a:endParaRPr>
+          </a:p>
+          <a:p>
+            <a:pPr marL="342900" lvl="0" indent="-342900" defTabSz="1219170">
+              <a:buFont typeface="Arial" panose="020B0604020202020204" pitchFamily="34" charset="0"/>
+              <a:buChar char="•"/>
+              <a:defRPr/>
+            </a:pPr>
+            <a:r>
+              <a:rPr lang="en-US" sz="1400" dirty="0">
+                <a:solidFill>
+                  <a:srgbClr val="000000"/>
+                </a:solidFill>
+              </a:rPr>
+              <a:t>Works well with sequential data </a:t>
+            </a:r>
+          </a:p>
+          <a:p>
+            <a:pPr marL="800100" lvl="1" indent="-342900" defTabSz="1219170">
+              <a:buFont typeface="Arial" panose="020B0604020202020204" pitchFamily="34" charset="0"/>
+              <a:buChar char="•"/>
+              <a:defRPr/>
+            </a:pPr>
+            <a:r>
+              <a:rPr lang="en-US" sz="1400" dirty="0">
+                <a:solidFill>
+                  <a:srgbClr val="000000"/>
+                </a:solidFill>
+              </a:rPr>
+              <a:t>time series forecasting</a:t>
+            </a:r>
+          </a:p>
+          <a:p>
+            <a:pPr marL="342900" indent="-342900" defTabSz="1219170">
+              <a:buFont typeface="Arial" panose="020B0604020202020204" pitchFamily="34" charset="0"/>
+              <a:buChar char="•"/>
+              <a:defRPr/>
+            </a:pPr>
+            <a:r>
+              <a:rPr lang="en-US" sz="1400" dirty="0">
+                <a:solidFill>
+                  <a:srgbClr val="000000"/>
+                </a:solidFill>
+              </a:rPr>
+              <a:t>Memory cell tracks the volatility over the past few days</a:t>
+            </a:r>
+          </a:p>
+          <a:p>
+            <a:pPr marL="800100" lvl="1" indent="-342900" defTabSz="1219170">
+              <a:buFont typeface="Arial" panose="020B0604020202020204" pitchFamily="34" charset="0"/>
+              <a:buChar char="•"/>
+              <a:defRPr/>
+            </a:pPr>
+            <a:r>
+              <a:rPr lang="en-US" sz="1400" dirty="0">
+                <a:solidFill>
+                  <a:srgbClr val="000000"/>
+                </a:solidFill>
+              </a:rPr>
+              <a:t>Like a moving average</a:t>
+            </a:r>
+          </a:p>
+          <a:p>
+            <a:pPr marL="342900" indent="-342900" defTabSz="1219170">
+              <a:buFont typeface="Arial" panose="020B0604020202020204" pitchFamily="34" charset="0"/>
+              <a:buChar char="•"/>
+              <a:defRPr/>
+            </a:pPr>
+            <a:r>
+              <a:rPr lang="en-US" sz="1400" dirty="0">
+                <a:solidFill>
+                  <a:srgbClr val="000000"/>
+                </a:solidFill>
+              </a:rPr>
+              <a:t>Good for volatility tracking</a:t>
+            </a:r>
+          </a:p>
+          <a:p>
+            <a:pPr marL="800100" lvl="1" indent="-342900" defTabSz="1219170">
+              <a:buFont typeface="Arial" panose="020B0604020202020204" pitchFamily="34" charset="0"/>
+              <a:buChar char="•"/>
+              <a:defRPr/>
+            </a:pPr>
+            <a:r>
+              <a:rPr lang="en-US" sz="1400" dirty="0">
+                <a:solidFill>
+                  <a:srgbClr val="000000"/>
+                </a:solidFill>
+              </a:rPr>
+              <a:t>Time dependent</a:t>
+            </a:r>
           </a:p>
         </p:txBody>
       </p:sp>
@@ -6458,37 +6680,103 @@
           </a:bodyPr>
           <a:lstStyle/>
           <a:p>
-            <a:pPr marL="0" marR="0" lvl="0" indent="0" algn="l" defTabSz="1219170" rtl="0" eaLnBrk="1" fontAlgn="auto" latinLnBrk="0" hangingPunct="1">
-              <a:lnSpc>
-                <a:spcPct val="100000"/>
-              </a:lnSpc>
-              <a:spcBef>
-                <a:spcPts val="0"/>
-              </a:spcBef>
-              <a:spcAft>
-                <a:spcPts val="0"/>
-              </a:spcAft>
-              <a:buClrTx/>
-              <a:buSzTx/>
-              <a:buFontTx/>
-              <a:buNone/>
-              <a:tabLst/>
+            <a:pPr marL="342900" lvl="0" indent="-342900" defTabSz="1219170">
+              <a:buFont typeface="Arial" panose="020B0604020202020204" pitchFamily="34" charset="0"/>
+              <a:buChar char="•"/>
               <a:defRPr/>
             </a:pPr>
-            <a:endParaRPr kumimoji="0" lang="en-US" sz="2400" b="0" i="0" u="none" strike="noStrike" kern="1200" cap="none" spc="0" normalizeH="0" baseline="0" noProof="0">
-              <a:ln>
-                <a:noFill/>
-              </a:ln>
+            <a:endParaRPr lang="en-US" sz="1400" dirty="0">
               <a:solidFill>
                 <a:srgbClr val="000000"/>
               </a:solidFill>
-              <a:effectLst/>
-              <a:uLnTx/>
-              <a:uFillTx/>
-              <a:latin typeface="Arial"/>
-              <a:ea typeface="+mn-ea"/>
-              <a:cs typeface="+mn-cs"/>
             </a:endParaRPr>
+          </a:p>
+          <a:p>
+            <a:pPr marL="342900" lvl="0" indent="-342900" defTabSz="1219170">
+              <a:buFont typeface="Arial" panose="020B0604020202020204" pitchFamily="34" charset="0"/>
+              <a:buChar char="•"/>
+              <a:defRPr/>
+            </a:pPr>
+            <a:endParaRPr lang="en-US" sz="1400" dirty="0">
+              <a:solidFill>
+                <a:srgbClr val="000000"/>
+              </a:solidFill>
+            </a:endParaRPr>
+          </a:p>
+          <a:p>
+            <a:pPr marL="342900" lvl="0" indent="-342900" defTabSz="1219170">
+              <a:buFont typeface="Arial" panose="020B0604020202020204" pitchFamily="34" charset="0"/>
+              <a:buChar char="•"/>
+              <a:defRPr/>
+            </a:pPr>
+            <a:r>
+              <a:rPr lang="en-US" sz="1400" dirty="0">
+                <a:solidFill>
+                  <a:srgbClr val="000000"/>
+                </a:solidFill>
+              </a:rPr>
+              <a:t>Harder to interpret compared to other models</a:t>
+            </a:r>
+          </a:p>
+          <a:p>
+            <a:pPr marL="800100" lvl="1" indent="-342900" defTabSz="1219170">
+              <a:buFont typeface="Arial" panose="020B0604020202020204" pitchFamily="34" charset="0"/>
+              <a:buChar char="•"/>
+              <a:defRPr/>
+            </a:pPr>
+            <a:r>
+              <a:rPr lang="en-US" sz="1400" dirty="0">
+                <a:solidFill>
+                  <a:srgbClr val="000000"/>
+                </a:solidFill>
+              </a:rPr>
+              <a:t>No set coefficient table</a:t>
+            </a:r>
+          </a:p>
+          <a:p>
+            <a:pPr marL="800100" lvl="1" indent="-342900" defTabSz="1219170">
+              <a:buFont typeface="Arial" panose="020B0604020202020204" pitchFamily="34" charset="0"/>
+              <a:buChar char="•"/>
+              <a:defRPr/>
+            </a:pPr>
+            <a:r>
+              <a:rPr lang="en-US" sz="1400" dirty="0">
+                <a:solidFill>
+                  <a:srgbClr val="000000"/>
+                </a:solidFill>
+              </a:rPr>
+              <a:t>Can overfit easily when labels are noisy</a:t>
+            </a:r>
+          </a:p>
+          <a:p>
+            <a:pPr marL="800100" lvl="1" indent="-342900" defTabSz="1219170">
+              <a:buFont typeface="Arial" panose="020B0604020202020204" pitchFamily="34" charset="0"/>
+              <a:buChar char="•"/>
+              <a:defRPr/>
+            </a:pPr>
+            <a:r>
+              <a:rPr lang="en-US" sz="1400" dirty="0">
+                <a:solidFill>
+                  <a:srgbClr val="000000"/>
+                </a:solidFill>
+              </a:rPr>
+              <a:t>Training is very fragile</a:t>
+            </a:r>
+          </a:p>
+          <a:p>
+            <a:pPr marL="342900" indent="-342900" defTabSz="1219170">
+              <a:buFont typeface="Arial" panose="020B0604020202020204" pitchFamily="34" charset="0"/>
+              <a:buChar char="•"/>
+              <a:defRPr/>
+            </a:pPr>
+            <a:r>
+              <a:rPr lang="en-US" sz="1400" dirty="0">
+                <a:solidFill>
+                  <a:srgbClr val="000000"/>
+                </a:solidFill>
+              </a:rPr>
+              <a:t>Elastic Net is clearer and more regular for example</a:t>
+            </a:r>
           </a:p>
         </p:txBody>
       </p:sp>
@@ -6672,7 +6960,7 @@
             </a:r>
           </a:p>
           <a:p>
-            <a:pPr marL="0" marR="0" lvl="0" indent="0" algn="l" defTabSz="1219170" rtl="0" eaLnBrk="1" fontAlgn="auto" latinLnBrk="0" hangingPunct="1">
+            <a:pPr marL="342900" marR="0" lvl="0" indent="-342900" algn="l" defTabSz="1219170" rtl="0" eaLnBrk="1" fontAlgn="auto" latinLnBrk="0" hangingPunct="1">
               <a:lnSpc>
                 <a:spcPct val="100000"/>
               </a:lnSpc>
@@ -6684,25 +6972,131 @@
               </a:spcAft>
               <a:buClrTx/>
               <a:buSzTx/>
-              <a:buFontTx/>
-              <a:buNone/>
+              <a:buFont typeface="Arial" panose="020B0604020202020204" pitchFamily="34" charset="0"/>
+              <a:buChar char="•"/>
               <a:tabLst/>
               <a:defRPr/>
             </a:pPr>
-            <a:endParaRPr kumimoji="0" lang="en-US" sz="2400" b="0" i="0" u="none" strike="noStrike" kern="1200" cap="none" spc="0" normalizeH="0" baseline="0" noProof="0" dirty="0">
-              <a:ln>
-                <a:noFill/>
-              </a:ln>
+            <a:r>
+              <a:rPr lang="en-US" sz="1400" dirty="0">
+                <a:solidFill>
+                  <a:srgbClr val="000000"/>
+                </a:solidFill>
+              </a:rPr>
+              <a:t>Type of recurrent neural network</a:t>
+            </a:r>
+          </a:p>
+          <a:p>
+            <a:pPr marL="800100" lvl="1" indent="-342900" defTabSz="1219170">
+              <a:buFont typeface="Arial" panose="020B0604020202020204" pitchFamily="34" charset="0"/>
+              <a:buChar char="•"/>
+              <a:defRPr/>
+            </a:pPr>
+            <a:r>
+              <a:rPr kumimoji="0" lang="en-US" sz="1400" b="0" i="0" u="none" strike="noStrike" kern="1200" cap="none" spc="0" normalizeH="0" baseline="0" noProof="0" dirty="0">
+                <a:ln>
+                  <a:noFill/>
+                </a:ln>
+                <a:solidFill>
+                  <a:srgbClr val="000000"/>
+                </a:solidFill>
+                <a:effectLst/>
+                <a:uLnTx/>
+                <a:uFillTx/>
+                <a:ea typeface="+mn-ea"/>
+                <a:cs typeface="+mn-cs"/>
+              </a:rPr>
+              <a:t>Learn</a:t>
+            </a:r>
+            <a:r>
+              <a:rPr lang="en-US" sz="1400" dirty="0">
+                <a:solidFill>
+                  <a:srgbClr val="000000"/>
+                </a:solidFill>
+              </a:rPr>
+              <a:t>s long-term dependencies</a:t>
+            </a:r>
+          </a:p>
+          <a:p>
+            <a:pPr marL="800100" lvl="1" indent="-342900" defTabSz="1219170">
+              <a:buFont typeface="Arial" panose="020B0604020202020204" pitchFamily="34" charset="0"/>
+              <a:buChar char="•"/>
+              <a:defRPr/>
+            </a:pPr>
+            <a:r>
+              <a:rPr lang="en-US" sz="1400" dirty="0">
+                <a:solidFill>
+                  <a:srgbClr val="000000"/>
+                </a:solidFill>
+              </a:rPr>
+              <a:t>Keeps memory</a:t>
+            </a:r>
+          </a:p>
+          <a:p>
+            <a:pPr marL="342900" indent="-342900" defTabSz="1219170">
+              <a:buFont typeface="Arial" panose="020B0604020202020204" pitchFamily="34" charset="0"/>
+              <a:buChar char="•"/>
+              <a:defRPr/>
+            </a:pPr>
+            <a:r>
+              <a:rPr kumimoji="0" lang="en-US" sz="1400" b="0" i="0" u="none" strike="noStrike" kern="1200" cap="none" spc="0" normalizeH="0" baseline="0" noProof="0" dirty="0">
+                <a:ln>
+                  <a:noFill/>
+                </a:ln>
+                <a:solidFill>
+                  <a:srgbClr val="000000"/>
+                </a:solidFill>
+                <a:effectLst/>
+                <a:uLnTx/>
+                <a:uFillTx/>
+                <a:ea typeface="+mn-ea"/>
+                <a:cs typeface="+mn-cs"/>
+              </a:rPr>
+              <a:t>Uses forget, input, and output</a:t>
+            </a:r>
+            <a:endParaRPr lang="en-US" sz="1400" dirty="0">
               <a:solidFill>
                 <a:srgbClr val="000000"/>
               </a:solidFill>
-              <a:effectLst/>
-              <a:uLnTx/>
-              <a:uFillTx/>
-              <a:latin typeface="Arial"/>
-              <a:ea typeface="+mn-ea"/>
-              <a:cs typeface="+mn-cs"/>
             </a:endParaRPr>
+          </a:p>
+          <a:p>
+            <a:pPr marL="800100" lvl="1" indent="-342900" defTabSz="1219170">
+              <a:buFont typeface="Arial" panose="020B0604020202020204" pitchFamily="34" charset="0"/>
+              <a:buChar char="•"/>
+              <a:defRPr/>
+            </a:pPr>
+            <a:r>
+              <a:rPr lang="en-US" sz="1400" dirty="0">
+                <a:solidFill>
+                  <a:srgbClr val="000000"/>
+                </a:solidFill>
+              </a:rPr>
+              <a:t>Keeps context relevant over time</a:t>
+            </a:r>
+          </a:p>
+          <a:p>
+            <a:pPr marL="342900" indent="-342900" defTabSz="1219170">
+              <a:buFont typeface="Arial" panose="020B0604020202020204" pitchFamily="34" charset="0"/>
+              <a:buChar char="•"/>
+              <a:defRPr/>
+            </a:pPr>
+            <a:r>
+              <a:rPr kumimoji="0" lang="en-US" sz="1400" b="0" i="0" u="none" strike="noStrike" kern="1200" cap="none" spc="0" normalizeH="0" baseline="0" noProof="0" dirty="0">
+                <a:ln>
+                  <a:noFill/>
+                </a:ln>
+                <a:solidFill>
+                  <a:srgbClr val="000000"/>
+                </a:solidFill>
+                <a:effectLst/>
+                <a:uLnTx/>
+                <a:uFillTx/>
+                <a:ea typeface="+mn-ea"/>
+                <a:cs typeface="+mn-cs"/>
+              </a:rPr>
+              <a:t>Flexible learner</a:t>
+            </a:r>
           </a:p>
         </p:txBody>
       </p:sp>
@@ -10087,7 +10481,7 @@
             </p:custDataLst>
             <p:extLst>
               <p:ext uri="{D42A27DB-BD31-4B8C-83A1-F6EECF244321}">
-                <p14:modId xmlns:p14="http://schemas.microsoft.com/office/powerpoint/2010/main" val="3870027332"/>
+                <p14:modId xmlns:p14="http://schemas.microsoft.com/office/powerpoint/2010/main" val="2587413420"/>
               </p:ext>
             </p:extLst>
           </p:nvPr>
@@ -11302,14 +11696,17 @@
                           <a:tab pos="0" algn="l"/>
                         </a:tabLst>
                       </a:pPr>
-                      <a:endParaRPr lang="en-US" sz="1400" b="1" u="none" strike="noStrike" dirty="0">
-                        <a:solidFill>
-                          <a:srgbClr val="000000"/>
-                        </a:solidFill>
-                        <a:effectLst/>
-                        <a:uFillTx/>
-                        <a:latin typeface="Arial"/>
-                      </a:endParaRPr>
+                      <a:r>
+                        <a:rPr lang="en-US" sz="1400" b="1" u="none" strike="noStrike" dirty="0">
+                          <a:solidFill>
+                            <a:srgbClr val="000000"/>
+                          </a:solidFill>
+                          <a:effectLst/>
+                          <a:uFillTx/>
+                          <a:latin typeface="Arial"/>
+                        </a:rPr>
+                        <a:t>0.0949</a:t>
+                      </a:r>
                     </a:p>
                   </a:txBody>
                   <a:tcPr marL="121920" marR="121920" marT="60960" marB="60960" anchor="ctr">
@@ -11365,14 +11762,17 @@
                           <a:tab pos="0" algn="l"/>
                         </a:tabLst>
                       </a:pPr>
-                      <a:endParaRPr lang="en-US" sz="1400" b="1" u="none" strike="noStrike" dirty="0">
-                        <a:solidFill>
-                          <a:srgbClr val="000000"/>
-                        </a:solidFill>
-                        <a:effectLst/>
-                        <a:uFillTx/>
-                        <a:latin typeface="Arial"/>
-                      </a:endParaRPr>
+                      <a:r>
+                        <a:rPr lang="en-US" sz="1400" b="1" u="none" strike="noStrike" dirty="0">
+                          <a:solidFill>
+                            <a:srgbClr val="000000"/>
+                          </a:solidFill>
+                          <a:effectLst/>
+                          <a:uFillTx/>
+                          <a:latin typeface="Arial"/>
+                        </a:rPr>
+                        <a:t>0.0289</a:t>
+                      </a:r>
                     </a:p>
                   </a:txBody>
                   <a:tcPr marL="121920" marR="121920" marT="60960" marB="60960" anchor="ctr">
@@ -11425,14 +11825,17 @@
                           <a:tab pos="0" algn="l"/>
                         </a:tabLst>
                       </a:pPr>
-                      <a:endParaRPr lang="en-US" sz="1400" b="1" u="none" strike="noStrike" dirty="0">
-                        <a:solidFill>
-                          <a:srgbClr val="000000"/>
-                        </a:solidFill>
-                        <a:effectLst/>
-                        <a:uFillTx/>
-                        <a:latin typeface="Arial"/>
-                      </a:endParaRPr>
+                      <a:r>
+                        <a:rPr lang="en-US" sz="1400" b="1" u="none" strike="noStrike" dirty="0">
+                          <a:solidFill>
+                            <a:srgbClr val="000000"/>
+                          </a:solidFill>
+                          <a:effectLst/>
+                          <a:uFillTx/>
+                          <a:latin typeface="Arial"/>
+                        </a:rPr>
+                        <a:t>-0.2690</a:t>
+                      </a:r>
                     </a:p>
                   </a:txBody>
                   <a:tcPr marL="121920" marR="121920" marT="60960" marB="60960" anchor="ctr">
@@ -11485,14 +11888,17 @@
                           <a:tab pos="0" algn="l"/>
                         </a:tabLst>
                       </a:pPr>
-                      <a:endParaRPr lang="en-US" sz="1400" b="1" u="none" strike="noStrike" dirty="0">
-                        <a:solidFill>
-                          <a:srgbClr val="000000"/>
-                        </a:solidFill>
-                        <a:effectLst/>
-                        <a:uFillTx/>
-                        <a:latin typeface="Arial"/>
-                      </a:endParaRPr>
+                      <a:r>
+                        <a:rPr lang="en-US" sz="1400" b="1" u="none" strike="noStrike" dirty="0">
+                          <a:solidFill>
+                            <a:srgbClr val="000000"/>
+                          </a:solidFill>
+                          <a:effectLst/>
+                          <a:uFillTx/>
+                          <a:latin typeface="Arial"/>
+                        </a:rPr>
+                        <a:t>+0.0126</a:t>
+                      </a:r>
                     </a:p>
                   </a:txBody>
                   <a:tcPr marL="121920" marR="121920" marT="60960" marB="60960" anchor="ctr">
@@ -11656,14 +12062,17 @@
                           <a:tab pos="0" algn="l"/>
                         </a:tabLst>
                       </a:pPr>
-                      <a:endParaRPr lang="en-US" sz="1400" b="0" u="none" strike="noStrike" dirty="0">
-                        <a:solidFill>
-                          <a:srgbClr val="000000"/>
-                        </a:solidFill>
-                        <a:effectLst/>
-                        <a:uFillTx/>
-                        <a:latin typeface="Arial"/>
-                      </a:endParaRPr>
+                      <a:r>
+                        <a:rPr lang="en-US" sz="1400" b="1" u="none" strike="noStrike" dirty="0">
+                          <a:solidFill>
+                            <a:schemeClr val="accent5"/>
+                          </a:solidFill>
+                          <a:effectLst/>
+                          <a:uFillTx/>
+                          <a:latin typeface="Arial"/>
+                        </a:rPr>
+                        <a:t>0.0509</a:t>
+                      </a:r>
                     </a:p>
                   </a:txBody>
                   <a:tcPr marL="121920" marR="121920" marT="60960" marB="60960" anchor="ctr">
@@ -11721,14 +12130,17 @@
                           <a:tab pos="0" algn="l"/>
                         </a:tabLst>
                       </a:pPr>
-                      <a:endParaRPr lang="en-US" sz="1400" b="0" u="none" strike="noStrike" dirty="0">
-                        <a:solidFill>
-                          <a:srgbClr val="000000"/>
-                        </a:solidFill>
-                        <a:effectLst/>
-                        <a:uFillTx/>
-                        <a:latin typeface="Arial"/>
-                      </a:endParaRPr>
+                      <a:r>
+                        <a:rPr lang="en-US" sz="1400" b="1" u="none" strike="noStrike" dirty="0">
+                          <a:solidFill>
+                            <a:schemeClr val="accent5"/>
+                          </a:solidFill>
+                          <a:effectLst/>
+                          <a:uFillTx/>
+                          <a:latin typeface="Arial"/>
+                        </a:rPr>
+                        <a:t>0.00579</a:t>
+                      </a:r>
                     </a:p>
                   </a:txBody>
                   <a:tcPr marL="121920" marR="121920" marT="60960" marB="60960" anchor="ctr">
@@ -11783,14 +12195,17 @@
                           <a:tab pos="0" algn="l"/>
                         </a:tabLst>
                       </a:pPr>
-                      <a:endParaRPr lang="en-US" sz="1400" b="0" u="none" strike="noStrike" dirty="0">
-                        <a:solidFill>
-                          <a:srgbClr val="000000"/>
-                        </a:solidFill>
-                        <a:effectLst/>
-                        <a:uFillTx/>
-                        <a:latin typeface="Arial"/>
-                      </a:endParaRPr>
+                      <a:r>
+                        <a:rPr lang="en-US" sz="1400" b="1" u="none" strike="noStrike" dirty="0">
+                          <a:solidFill>
+                            <a:schemeClr val="accent5"/>
+                          </a:solidFill>
+                          <a:effectLst/>
+                          <a:uFillTx/>
+                          <a:latin typeface="Arial"/>
+                        </a:rPr>
+                        <a:t>0.7418</a:t>
+                      </a:r>
                     </a:p>
                   </a:txBody>
                   <a:tcPr marL="121920" marR="121920" marT="60960" marB="60960" anchor="ctr">
@@ -11845,9 +12260,32 @@
                           <a:tab pos="0" algn="l"/>
                         </a:tabLst>
                       </a:pPr>
-                      <a:endParaRPr lang="en-US" sz="1400" b="0" u="none" strike="noStrike" dirty="0">
+                      <a:r>
+                        <a:rPr lang="en-US" sz="1400" b="1" u="none" strike="noStrike" dirty="0">
+                          <a:solidFill>
+                            <a:schemeClr val="accent6"/>
+                          </a:solidFill>
+                          <a:effectLst/>
+                          <a:uFillTx/>
+                          <a:latin typeface="Arial"/>
+                        </a:rPr>
+                        <a:t>-0.0314</a:t>
+                      </a:r>
+                      <a:r>
+                        <a:rPr lang="en-US" sz="1400" b="1" u="none" strike="noStrike" dirty="0">
+                          <a:solidFill>
+                            <a:schemeClr val="accent6"/>
+                          </a:solidFill>
+                          <a:effectLst/>
+                          <a:uFillTx/>
+                          <a:latin typeface="+mn-lt"/>
+                          <a:ea typeface="Calibri"/>
+                        </a:rPr>
+                        <a:t> ★</a:t>
+                      </a:r>
+                      <a:endParaRPr lang="en-US" sz="1400" b="1" u="none" strike="noStrike" dirty="0">
                         <a:solidFill>
-                          <a:srgbClr val="000000"/>
+                          <a:schemeClr val="accent6"/>
                         </a:solidFill>
                         <a:effectLst/>
                         <a:uFillTx/>
@@ -29305,6 +29743,7 @@
 
 <file path=docMetadata/LabelInfo.xml><?xml version="1.0" encoding="utf-8"?>
 <clbl:labelList xmlns:clbl="http://schemas.microsoft.com/office/2020/mipLabelMetadata">
+  <clbl:label id="{c8f49a32-fde3-48a5-9266-b5b0972a22dc}" enabled="1" method="Standard" siteId="{5ae1af62-9505-4097-a69a-c1553ef7840e}" contentBits="2" removed="0"/>
   <clbl:label id="{f42aa342-8706-4288-bd11-ebb85995028c}" enabled="1" method="Standard" siteId="{72f988bf-86f1-41af-91ab-2d7cd011db47}" contentBits="0" removed="0"/>
 </clbl:labelList>
 </file>
--- a/slides/Forecasting Volatility In Stock Market V2.pptx
+++ b/slides/Forecasting Volatility In Stock Market V2.pptx
@@ -10481,7 +10481,7 @@
             </p:custDataLst>
             <p:extLst>
               <p:ext uri="{D42A27DB-BD31-4B8C-83A1-F6EECF244321}">
-                <p14:modId xmlns:p14="http://schemas.microsoft.com/office/powerpoint/2010/main" val="2587413420"/>
+                <p14:modId xmlns:p14="http://schemas.microsoft.com/office/powerpoint/2010/main" val="3912228752"/>
               </p:ext>
             </p:extLst>
           </p:nvPr>
@@ -12433,6 +12433,19 @@
                           <a:tab pos="0" algn="l"/>
                         </a:tabLst>
                       </a:pPr>
+                      <a:r>
+                        <a:rPr lang="en-US" altLang="zh-TW" sz="1400" b="1" u="none" strike="noStrike" kern="1200" dirty="0">
+                          <a:solidFill>
+                            <a:srgbClr val="000000"/>
+                          </a:solidFill>
+                          <a:effectLst/>
+                          <a:uFillTx/>
+                          <a:latin typeface="Calibri"/>
+                          <a:ea typeface="Calibri"/>
+                          <a:cs typeface="+mn-cs"/>
+                        </a:rPr>
+                        <a:t>0.0889</a:t>
+                      </a:r>
                       <a:endParaRPr lang="en-US" sz="1400" b="1" u="none" strike="noStrike" kern="1200" dirty="0">
                         <a:solidFill>
                           <a:srgbClr val="000000"/>
@@ -12498,6 +12511,19 @@
                           <a:tab pos="0" algn="l"/>
                         </a:tabLst>
                       </a:pPr>
+                      <a:r>
+                        <a:rPr lang="en-US" altLang="zh-TW" sz="1400" b="1" u="none" strike="noStrike" kern="1200" dirty="0">
+                          <a:solidFill>
+                            <a:srgbClr val="000000"/>
+                          </a:solidFill>
+                          <a:effectLst/>
+                          <a:uFillTx/>
+                          <a:latin typeface="Calibri"/>
+                          <a:ea typeface="Calibri"/>
+                          <a:cs typeface="+mn-cs"/>
+                        </a:rPr>
+                        <a:t>0.1491</a:t>
+                      </a:r>
                       <a:endParaRPr lang="en-US" sz="1400" b="1" u="none" strike="noStrike" kern="1200" dirty="0">
                         <a:solidFill>
                           <a:srgbClr val="000000"/>
@@ -12563,6 +12589,19 @@
                           <a:tab pos="0" algn="l"/>
                         </a:tabLst>
                       </a:pPr>
+                      <a:r>
+                        <a:rPr lang="en-US" altLang="zh-TW" sz="1400" b="1" u="none" strike="noStrike" kern="1200" dirty="0">
+                          <a:solidFill>
+                            <a:srgbClr val="000000"/>
+                          </a:solidFill>
+                          <a:effectLst/>
+                          <a:uFillTx/>
+                          <a:latin typeface="Calibri"/>
+                          <a:ea typeface="Calibri"/>
+                          <a:cs typeface="+mn-cs"/>
+                        </a:rPr>
+                        <a:t>0.0212</a:t>
+                      </a:r>
                       <a:endParaRPr lang="en-US" sz="1400" b="1" u="none" strike="noStrike" kern="1200" dirty="0">
                         <a:solidFill>
                           <a:srgbClr val="000000"/>
@@ -12628,6 +12667,17 @@
                           <a:tab pos="0" algn="l"/>
                         </a:tabLst>
                       </a:pPr>
+                      <a:r>
+                        <a:rPr lang="en-US" altLang="zh-TW" sz="1400" b="1" u="none" strike="noStrike">
+                          <a:solidFill>
+                            <a:srgbClr val="000000"/>
+                          </a:solidFill>
+                          <a:effectLst/>
+                          <a:uFillTx/>
+                          <a:latin typeface="Arial"/>
+                        </a:rPr>
+                        <a:t>+0.066</a:t>
+                      </a:r>
                       <a:endParaRPr lang="en-US" sz="1400" b="1" u="none" strike="noStrike" dirty="0">
                         <a:solidFill>
                           <a:srgbClr val="000000"/>
@@ -12790,6 +12840,19 @@
                           <a:tab pos="0" algn="l"/>
                         </a:tabLst>
                       </a:pPr>
+                      <a:r>
+                        <a:rPr lang="en-US" sz="1400" b="1" u="none" strike="noStrike" kern="1200" dirty="0">
+                          <a:solidFill>
+                            <a:srgbClr val="000000"/>
+                          </a:solidFill>
+                          <a:effectLst/>
+                          <a:uFillTx/>
+                          <a:latin typeface="+mn-lt"/>
+                          <a:ea typeface="Calibri"/>
+                          <a:cs typeface="+mn-cs"/>
+                        </a:rPr>
+                        <a:t>0.1056</a:t>
+                      </a:r>
                       <a:endParaRPr lang="en-US" sz="1400" b="1" u="none" strike="noStrike" kern="1200" dirty="0">
                         <a:solidFill>
                           <a:srgbClr val="000000"/>
@@ -12857,6 +12920,19 @@
                           <a:tab pos="0" algn="l"/>
                         </a:tabLst>
                       </a:pPr>
+                      <a:r>
+                        <a:rPr lang="en-US" sz="1400" b="1" u="none" strike="noStrike" kern="1200" dirty="0">
+                          <a:solidFill>
+                            <a:srgbClr val="000000"/>
+                          </a:solidFill>
+                          <a:effectLst/>
+                          <a:uFillTx/>
+                          <a:latin typeface="+mn-lt"/>
+                          <a:ea typeface="Calibri"/>
+                          <a:cs typeface="+mn-cs"/>
+                        </a:rPr>
+                        <a:t>0.1565</a:t>
+                      </a:r>
                       <a:endParaRPr lang="en-US" sz="1400" b="1" u="none" strike="noStrike" kern="1200" dirty="0">
                         <a:solidFill>
                           <a:srgbClr val="000000"/>
@@ -12921,6 +12997,19 @@
                           <a:tab pos="0" algn="l"/>
                         </a:tabLst>
                       </a:pPr>
+                      <a:r>
+                        <a:rPr lang="en-US" sz="1400" b="1" u="none" strike="noStrike" kern="1200" dirty="0">
+                          <a:solidFill>
+                            <a:srgbClr val="000000"/>
+                          </a:solidFill>
+                          <a:effectLst/>
+                          <a:uFillTx/>
+                          <a:latin typeface="+mn-lt"/>
+                          <a:ea typeface="Calibri"/>
+                          <a:cs typeface="+mn-cs"/>
+                        </a:rPr>
+                        <a:t>-0.078780</a:t>
+                      </a:r>
                       <a:endParaRPr lang="en-US" sz="1400" b="1" u="none" strike="noStrike" kern="1200" dirty="0">
                         <a:solidFill>
                           <a:srgbClr val="000000"/>
@@ -12977,22 +13066,42 @@
                     <a:bodyPr/>
                     <a:lstStyle/>
                     <a:p>
-                      <a:pPr algn="ctr" defTabSz="914400">
+                      <a:pPr marL="0" marR="0" lvl="0" indent="0" algn="ctr" defTabSz="914400" rtl="0" eaLnBrk="1" fontAlgn="auto" latinLnBrk="0" hangingPunct="1">
                         <a:lnSpc>
                           <a:spcPct val="100000"/>
                         </a:lnSpc>
+                        <a:spcBef>
+                          <a:spcPts val="0"/>
+                        </a:spcBef>
+                        <a:spcAft>
+                          <a:spcPts val="0"/>
+                        </a:spcAft>
+                        <a:buClrTx/>
+                        <a:buSzTx/>
+                        <a:buFontTx/>
+                        <a:buNone/>
                         <a:tabLst>
                           <a:tab pos="0" algn="l"/>
                         </a:tabLst>
+                        <a:defRPr/>
                       </a:pPr>
-                      <a:endParaRPr lang="en-US" sz="1400" b="0" u="none" strike="noStrike" dirty="0">
-                        <a:solidFill>
-                          <a:srgbClr val="000000"/>
-                        </a:solidFill>
-                        <a:effectLst/>
-                        <a:uFillTx/>
-                        <a:latin typeface="Arial"/>
-                      </a:endParaRPr>
+                      <a:r>
+                        <a:rPr kumimoji="0" lang="en-US" altLang="zh-TW" sz="1400" b="1" i="0" u="none" strike="noStrike" kern="1200" cap="none" spc="0" normalizeH="0" baseline="0" noProof="0" dirty="0">
+                          <a:ln>
+                            <a:noFill/>
+                          </a:ln>
+                          <a:solidFill>
+                            <a:schemeClr val="tx1"/>
+                          </a:solidFill>
+                          <a:effectLst/>
+                          <a:uLnTx/>
+                          <a:uFillTx/>
+                          <a:latin typeface="+mn-lt"/>
+                          <a:ea typeface="Calibri"/>
+                          <a:cs typeface="+mn-cs"/>
+                        </a:rPr>
+                        <a:t>+0.0232</a:t>
+                      </a:r>
                     </a:p>
                   </a:txBody>
                   <a:tcPr marL="121920" marR="121920" marT="60960" marB="60960" anchor="ctr">
